--- a/apps/resources/bundled_files/4-klass-birdikterdi-almashtyruu-sabak.pptx
+++ b/apps/resources/bundled_files/4-klass-birdikterdi-almashtyruu-sabak.pptx
@@ -5196,7 +5196,7 @@
                 </a:solidFill>
                 <a:latin typeface="PT Sans"/>
               </a:rPr>
-              <a:t>4-класс · Математика</a:t>
+              <a:t/>
             </a:r>
           </a:p>
         </p:txBody>
@@ -5688,7 +5688,7 @@
                 </a:solidFill>
                 <a:latin typeface="PT Sans"/>
               </a:rPr>
-              <a:t>4-класс ›</a:t>
+              <a:t/>
             </a:r>
           </a:p>
           <a:p>
@@ -6621,7 +6621,7 @@
                 </a:solidFill>
                 <a:latin typeface="PT Sans"/>
               </a:rPr>
-              <a:t>4-класс ›</a:t>
+              <a:t/>
             </a:r>
           </a:p>
           <a:p>
@@ -11821,7 +11821,7 @@
                 </a:solidFill>
                 <a:latin typeface="PT Sans"/>
               </a:rPr>
-              <a:t>4-класс ›</a:t>
+              <a:t/>
             </a:r>
           </a:p>
           <a:p>
@@ -21098,7 +21098,7 @@
                 </a:solidFill>
                 <a:latin typeface="PT Sans"/>
               </a:rPr>
-              <a:t>4-класс ›</a:t>
+              <a:t/>
             </a:r>
           </a:p>
           <a:p>
@@ -22681,7 +22681,7 @@
                 </a:solidFill>
                 <a:latin typeface="PT Sans"/>
               </a:rPr>
-              <a:t>4-класс ›</a:t>
+              <a:t/>
             </a:r>
           </a:p>
           <a:p>
@@ -23393,7 +23393,7 @@
                 </a:solidFill>
                 <a:latin typeface="PT Sans"/>
               </a:rPr>
-              <a:t>4-класс ›</a:t>
+              <a:t/>
             </a:r>
           </a:p>
           <a:p>
@@ -24066,7 +24066,7 @@
                 </a:solidFill>
                 <a:latin typeface="PT Sans"/>
               </a:rPr>
-              <a:t>4-класс ›</a:t>
+              <a:t/>
             </a:r>
           </a:p>
           <a:p>
@@ -25615,7 +25615,7 @@
                 </a:solidFill>
                 <a:latin typeface="PT Sans"/>
               </a:rPr>
-              <a:t>4-класс ›</a:t>
+              <a:t/>
             </a:r>
           </a:p>
           <a:p>
@@ -26699,7 +26699,7 @@
                 </a:solidFill>
                 <a:latin typeface="PT Sans"/>
               </a:rPr>
-              <a:t>4-класс ›</a:t>
+              <a:t/>
             </a:r>
           </a:p>
           <a:p>
@@ -28229,7 +28229,7 @@
                 </a:solidFill>
                 <a:latin typeface="PT Sans"/>
               </a:rPr>
-              <a:t>4-класс ›</a:t>
+              <a:t/>
             </a:r>
           </a:p>
           <a:p>
@@ -29822,7 +29822,7 @@
                 </a:solidFill>
                 <a:latin typeface="PT Sans"/>
               </a:rPr>
-              <a:t>4-класс ›</a:t>
+              <a:t/>
             </a:r>
           </a:p>
           <a:p>
@@ -31099,7 +31099,7 @@
                 </a:solidFill>
                 <a:latin typeface="PT Sans"/>
               </a:rPr>
-              <a:t>4-класс ›</a:t>
+              <a:t/>
             </a:r>
           </a:p>
           <a:p>
@@ -32527,7 +32527,7 @@
                 </a:solidFill>
                 <a:latin typeface="PT Sans"/>
               </a:rPr>
-              <a:t>4-класс ›</a:t>
+              <a:t/>
             </a:r>
           </a:p>
           <a:p>
@@ -33983,7 +33983,7 @@
                 </a:solidFill>
                 <a:latin typeface="PT Sans"/>
               </a:rPr>
-              <a:t>4-класс ›</a:t>
+              <a:t/>
             </a:r>
           </a:p>
           <a:p>
@@ -35147,7 +35147,7 @@
                 </a:solidFill>
                 <a:latin typeface="PT Sans"/>
               </a:rPr>
-              <a:t>4-класс ›</a:t>
+              <a:t/>
             </a:r>
           </a:p>
           <a:p>
@@ -35947,7 +35947,7 @@
                 </a:solidFill>
                 <a:latin typeface="PT Sans"/>
               </a:rPr>
-              <a:t>4-класс ›</a:t>
+              <a:t/>
             </a:r>
           </a:p>
           <a:p>
@@ -36788,7 +36788,7 @@
                 </a:solidFill>
                 <a:latin typeface="PT Sans"/>
               </a:rPr>
-              <a:t>4-класс ›</a:t>
+              <a:t/>
             </a:r>
           </a:p>
           <a:p>
@@ -37737,7 +37737,7 @@
                 </a:solidFill>
                 <a:latin typeface="PT Sans"/>
               </a:rPr>
-              <a:t>4-класс ›</a:t>
+              <a:t/>
             </a:r>
           </a:p>
           <a:p>
@@ -39191,7 +39191,7 @@
                 </a:solidFill>
                 <a:latin typeface="PT Sans"/>
               </a:rPr>
-              <a:t>4-класс ›</a:t>
+              <a:t/>
             </a:r>
           </a:p>
           <a:p>
@@ -39937,7 +39937,7 @@
                 </a:solidFill>
                 <a:latin typeface="PT Sans"/>
               </a:rPr>
-              <a:t>4-класс ›</a:t>
+              <a:t/>
             </a:r>
           </a:p>
           <a:p>
@@ -40745,7 +40745,7 @@
                 </a:solidFill>
                 <a:latin typeface="PT Sans"/>
               </a:rPr>
-              <a:t>4-класс ›</a:t>
+              <a:t/>
             </a:r>
           </a:p>
           <a:p>
@@ -41936,7 +41936,7 @@
                 </a:solidFill>
                 <a:latin typeface="PT Sans"/>
               </a:rPr>
-              <a:t>4-класс ›</a:t>
+              <a:t/>
             </a:r>
           </a:p>
           <a:p>
@@ -43115,7 +43115,7 @@
                 </a:solidFill>
                 <a:latin typeface="PT Sans"/>
               </a:rPr>
-              <a:t>4-класс ›</a:t>
+              <a:t/>
             </a:r>
           </a:p>
           <a:p>
@@ -43296,7 +43296,7 @@
                 </a:solidFill>
                 <a:latin typeface="PT Sans"/>
               </a:rPr>
-              <a:t>3-класс</a:t>
+              <a:t/>
             </a:r>
           </a:p>
         </p:txBody>
@@ -43476,7 +43476,7 @@
                 </a:solidFill>
                 <a:latin typeface="PT Sans"/>
               </a:rPr>
-              <a:t>4-класс</a:t>
+              <a:t/>
             </a:r>
           </a:p>
         </p:txBody>
@@ -43712,7 +43712,7 @@
                 </a:solidFill>
                 <a:latin typeface="PT Sans"/>
               </a:rPr>
-              <a:t>5-класс</a:t>
+              <a:t/>
             </a:r>
           </a:p>
         </p:txBody>
@@ -43893,7 +43893,7 @@
                 </a:solidFill>
                 <a:latin typeface="PT Sans"/>
               </a:rPr>
-              <a:t>6-класс</a:t>
+              <a:t/>
             </a:r>
           </a:p>
         </p:txBody>
@@ -44313,7 +44313,7 @@
                 </a:solidFill>
                 <a:latin typeface="PT Sans"/>
               </a:rPr>
-              <a:t>4-класс ›</a:t>
+              <a:t/>
             </a:r>
           </a:p>
           <a:p>
@@ -45461,7 +45461,7 @@
                 </a:solidFill>
                 <a:latin typeface="PT Sans"/>
               </a:rPr>
-              <a:t>4-класс ›</a:t>
+              <a:t/>
             </a:r>
           </a:p>
           <a:p>

--- a/apps/resources/bundled_files/4-klass-birdikterdi-almashtyruu-sabak.pptx
+++ b/apps/resources/bundled_files/4-klass-birdikterdi-almashtyruu-sabak.pptx
@@ -1582,7 +1582,7 @@
           <a:lstStyle/>
           <a:p>
             <a:r>
-              <a:t>Ой жүгүртүү маданияты (Wenxi Lee, 2.6).</a:t>
+              <a:t>Ой жүгүртүү маданияты (Wenxi Lee, 2,6).</a:t>
             </a:r>
           </a:p>
         </p:txBody>
